--- a/主耶穌復活了.pptx
+++ b/主耶穌復活了.pptx
@@ -164,7 +164,7 @@
           <a:lstStyle/>
           <a:p>
             <a:r>
-              <a:rPr lang="en-US" altLang="zh-TW" smtClean="0"/>
+              <a:rPr lang="en-US" altLang="zh-TW"/>
               <a:t>Click to edit Master title style</a:t>
             </a:r>
             <a:endParaRPr lang="zh-TW" altLang="en-US"/>
@@ -283,7 +283,7 @@
           </a:lstStyle>
           <a:p>
             <a:r>
-              <a:rPr lang="en-US" altLang="zh-TW" smtClean="0"/>
+              <a:rPr lang="en-US" altLang="zh-TW"/>
               <a:t>Click to edit Master subtitle style</a:t>
             </a:r>
             <a:endParaRPr lang="zh-TW" altLang="en-US"/>
@@ -307,7 +307,7 @@
           <a:p>
             <a:fld id="{4DA9F5A9-C214-45DC-94BF-988DC142EE2C}" type="datetimeFigureOut">
               <a:rPr lang="zh-TW" altLang="en-US" smtClean="0"/>
-              <a:t>2022/4/16</a:t>
+              <a:t>2026/3/30</a:t>
             </a:fld>
             <a:endParaRPr lang="zh-TW" altLang="en-US"/>
           </a:p>
@@ -401,7 +401,7 @@
           <a:lstStyle/>
           <a:p>
             <a:r>
-              <a:rPr lang="en-US" altLang="zh-TW" smtClean="0"/>
+              <a:rPr lang="en-US" altLang="zh-TW"/>
               <a:t>Click to edit Master title style</a:t>
             </a:r>
             <a:endParaRPr lang="zh-TW" altLang="en-US"/>
@@ -425,35 +425,35 @@
           <a:p>
             <a:pPr lvl="0"/>
             <a:r>
-              <a:rPr lang="en-US" altLang="zh-TW" smtClean="0"/>
+              <a:rPr lang="en-US" altLang="zh-TW"/>
               <a:t>Edit Master text styles</a:t>
             </a:r>
           </a:p>
           <a:p>
             <a:pPr lvl="1"/>
             <a:r>
-              <a:rPr lang="en-US" altLang="zh-TW" smtClean="0"/>
+              <a:rPr lang="en-US" altLang="zh-TW"/>
               <a:t>Second level</a:t>
             </a:r>
           </a:p>
           <a:p>
             <a:pPr lvl="2"/>
             <a:r>
-              <a:rPr lang="en-US" altLang="zh-TW" smtClean="0"/>
+              <a:rPr lang="en-US" altLang="zh-TW"/>
               <a:t>Third level</a:t>
             </a:r>
           </a:p>
           <a:p>
             <a:pPr lvl="3"/>
             <a:r>
-              <a:rPr lang="en-US" altLang="zh-TW" smtClean="0"/>
+              <a:rPr lang="en-US" altLang="zh-TW"/>
               <a:t>Fourth level</a:t>
             </a:r>
           </a:p>
           <a:p>
             <a:pPr lvl="4"/>
             <a:r>
-              <a:rPr lang="en-US" altLang="zh-TW" smtClean="0"/>
+              <a:rPr lang="en-US" altLang="zh-TW"/>
               <a:t>Fifth level</a:t>
             </a:r>
             <a:endParaRPr lang="zh-TW" altLang="en-US"/>
@@ -477,7 +477,7 @@
           <a:p>
             <a:fld id="{4DA9F5A9-C214-45DC-94BF-988DC142EE2C}" type="datetimeFigureOut">
               <a:rPr lang="zh-TW" altLang="en-US" smtClean="0"/>
-              <a:t>2022/4/16</a:t>
+              <a:t>2026/3/30</a:t>
             </a:fld>
             <a:endParaRPr lang="zh-TW" altLang="en-US"/>
           </a:p>
@@ -576,7 +576,7 @@
           <a:lstStyle/>
           <a:p>
             <a:r>
-              <a:rPr lang="en-US" altLang="zh-TW" smtClean="0"/>
+              <a:rPr lang="en-US" altLang="zh-TW"/>
               <a:t>Click to edit Master title style</a:t>
             </a:r>
             <a:endParaRPr lang="zh-TW" altLang="en-US"/>
@@ -605,35 +605,35 @@
           <a:p>
             <a:pPr lvl="0"/>
             <a:r>
-              <a:rPr lang="en-US" altLang="zh-TW" smtClean="0"/>
+              <a:rPr lang="en-US" altLang="zh-TW"/>
               <a:t>Edit Master text styles</a:t>
             </a:r>
           </a:p>
           <a:p>
             <a:pPr lvl="1"/>
             <a:r>
-              <a:rPr lang="en-US" altLang="zh-TW" smtClean="0"/>
+              <a:rPr lang="en-US" altLang="zh-TW"/>
               <a:t>Second level</a:t>
             </a:r>
           </a:p>
           <a:p>
             <a:pPr lvl="2"/>
             <a:r>
-              <a:rPr lang="en-US" altLang="zh-TW" smtClean="0"/>
+              <a:rPr lang="en-US" altLang="zh-TW"/>
               <a:t>Third level</a:t>
             </a:r>
           </a:p>
           <a:p>
             <a:pPr lvl="3"/>
             <a:r>
-              <a:rPr lang="en-US" altLang="zh-TW" smtClean="0"/>
+              <a:rPr lang="en-US" altLang="zh-TW"/>
               <a:t>Fourth level</a:t>
             </a:r>
           </a:p>
           <a:p>
             <a:pPr lvl="4"/>
             <a:r>
-              <a:rPr lang="en-US" altLang="zh-TW" smtClean="0"/>
+              <a:rPr lang="en-US" altLang="zh-TW"/>
               <a:t>Fifth level</a:t>
             </a:r>
             <a:endParaRPr lang="zh-TW" altLang="en-US"/>
@@ -657,7 +657,7 @@
           <a:p>
             <a:fld id="{4DA9F5A9-C214-45DC-94BF-988DC142EE2C}" type="datetimeFigureOut">
               <a:rPr lang="zh-TW" altLang="en-US" smtClean="0"/>
-              <a:t>2022/4/16</a:t>
+              <a:t>2026/3/30</a:t>
             </a:fld>
             <a:endParaRPr lang="zh-TW" altLang="en-US"/>
           </a:p>
@@ -751,7 +751,7 @@
           <a:lstStyle/>
           <a:p>
             <a:r>
-              <a:rPr lang="en-US" altLang="zh-TW" smtClean="0"/>
+              <a:rPr lang="en-US" altLang="zh-TW"/>
               <a:t>Click to edit Master title style</a:t>
             </a:r>
             <a:endParaRPr lang="zh-TW" altLang="en-US"/>
@@ -775,35 +775,35 @@
           <a:p>
             <a:pPr lvl="0"/>
             <a:r>
-              <a:rPr lang="en-US" altLang="zh-TW" smtClean="0"/>
+              <a:rPr lang="en-US" altLang="zh-TW"/>
               <a:t>Edit Master text styles</a:t>
             </a:r>
           </a:p>
           <a:p>
             <a:pPr lvl="1"/>
             <a:r>
-              <a:rPr lang="en-US" altLang="zh-TW" smtClean="0"/>
+              <a:rPr lang="en-US" altLang="zh-TW"/>
               <a:t>Second level</a:t>
             </a:r>
           </a:p>
           <a:p>
             <a:pPr lvl="2"/>
             <a:r>
-              <a:rPr lang="en-US" altLang="zh-TW" smtClean="0"/>
+              <a:rPr lang="en-US" altLang="zh-TW"/>
               <a:t>Third level</a:t>
             </a:r>
           </a:p>
           <a:p>
             <a:pPr lvl="3"/>
             <a:r>
-              <a:rPr lang="en-US" altLang="zh-TW" smtClean="0"/>
+              <a:rPr lang="en-US" altLang="zh-TW"/>
               <a:t>Fourth level</a:t>
             </a:r>
           </a:p>
           <a:p>
             <a:pPr lvl="4"/>
             <a:r>
-              <a:rPr lang="en-US" altLang="zh-TW" smtClean="0"/>
+              <a:rPr lang="en-US" altLang="zh-TW"/>
               <a:t>Fifth level</a:t>
             </a:r>
             <a:endParaRPr lang="zh-TW" altLang="en-US"/>
@@ -827,7 +827,7 @@
           <a:p>
             <a:fld id="{4DA9F5A9-C214-45DC-94BF-988DC142EE2C}" type="datetimeFigureOut">
               <a:rPr lang="zh-TW" altLang="en-US" smtClean="0"/>
-              <a:t>2022/4/16</a:t>
+              <a:t>2026/3/30</a:t>
             </a:fld>
             <a:endParaRPr lang="zh-TW" altLang="en-US"/>
           </a:p>
@@ -930,7 +930,7 @@
           </a:lstStyle>
           <a:p>
             <a:r>
-              <a:rPr lang="en-US" altLang="zh-TW" smtClean="0"/>
+              <a:rPr lang="en-US" altLang="zh-TW"/>
               <a:t>Click to edit Master title style</a:t>
             </a:r>
             <a:endParaRPr lang="zh-TW" altLang="en-US"/>
@@ -1050,7 +1050,7 @@
           <a:p>
             <a:pPr lvl="0"/>
             <a:r>
-              <a:rPr lang="en-US" altLang="zh-TW" smtClean="0"/>
+              <a:rPr lang="en-US" altLang="zh-TW"/>
               <a:t>Edit Master text styles</a:t>
             </a:r>
           </a:p>
@@ -1073,7 +1073,7 @@
           <a:p>
             <a:fld id="{4DA9F5A9-C214-45DC-94BF-988DC142EE2C}" type="datetimeFigureOut">
               <a:rPr lang="zh-TW" altLang="en-US" smtClean="0"/>
-              <a:t>2022/4/16</a:t>
+              <a:t>2026/3/30</a:t>
             </a:fld>
             <a:endParaRPr lang="zh-TW" altLang="en-US"/>
           </a:p>
@@ -1167,7 +1167,7 @@
           <a:lstStyle/>
           <a:p>
             <a:r>
-              <a:rPr lang="en-US" altLang="zh-TW" smtClean="0"/>
+              <a:rPr lang="en-US" altLang="zh-TW"/>
               <a:t>Click to edit Master title style</a:t>
             </a:r>
             <a:endParaRPr lang="zh-TW" altLang="en-US"/>
@@ -1224,35 +1224,35 @@
           <a:p>
             <a:pPr lvl="0"/>
             <a:r>
-              <a:rPr lang="en-US" altLang="zh-TW" smtClean="0"/>
+              <a:rPr lang="en-US" altLang="zh-TW"/>
               <a:t>Edit Master text styles</a:t>
             </a:r>
           </a:p>
           <a:p>
             <a:pPr lvl="1"/>
             <a:r>
-              <a:rPr lang="en-US" altLang="zh-TW" smtClean="0"/>
+              <a:rPr lang="en-US" altLang="zh-TW"/>
               <a:t>Second level</a:t>
             </a:r>
           </a:p>
           <a:p>
             <a:pPr lvl="2"/>
             <a:r>
-              <a:rPr lang="en-US" altLang="zh-TW" smtClean="0"/>
+              <a:rPr lang="en-US" altLang="zh-TW"/>
               <a:t>Third level</a:t>
             </a:r>
           </a:p>
           <a:p>
             <a:pPr lvl="3"/>
             <a:r>
-              <a:rPr lang="en-US" altLang="zh-TW" smtClean="0"/>
+              <a:rPr lang="en-US" altLang="zh-TW"/>
               <a:t>Fourth level</a:t>
             </a:r>
           </a:p>
           <a:p>
             <a:pPr lvl="4"/>
             <a:r>
-              <a:rPr lang="en-US" altLang="zh-TW" smtClean="0"/>
+              <a:rPr lang="en-US" altLang="zh-TW"/>
               <a:t>Fifth level</a:t>
             </a:r>
             <a:endParaRPr lang="zh-TW" altLang="en-US"/>
@@ -1309,35 +1309,35 @@
           <a:p>
             <a:pPr lvl="0"/>
             <a:r>
-              <a:rPr lang="en-US" altLang="zh-TW" smtClean="0"/>
+              <a:rPr lang="en-US" altLang="zh-TW"/>
               <a:t>Edit Master text styles</a:t>
             </a:r>
           </a:p>
           <a:p>
             <a:pPr lvl="1"/>
             <a:r>
-              <a:rPr lang="en-US" altLang="zh-TW" smtClean="0"/>
+              <a:rPr lang="en-US" altLang="zh-TW"/>
               <a:t>Second level</a:t>
             </a:r>
           </a:p>
           <a:p>
             <a:pPr lvl="2"/>
             <a:r>
-              <a:rPr lang="en-US" altLang="zh-TW" smtClean="0"/>
+              <a:rPr lang="en-US" altLang="zh-TW"/>
               <a:t>Third level</a:t>
             </a:r>
           </a:p>
           <a:p>
             <a:pPr lvl="3"/>
             <a:r>
-              <a:rPr lang="en-US" altLang="zh-TW" smtClean="0"/>
+              <a:rPr lang="en-US" altLang="zh-TW"/>
               <a:t>Fourth level</a:t>
             </a:r>
           </a:p>
           <a:p>
             <a:pPr lvl="4"/>
             <a:r>
-              <a:rPr lang="en-US" altLang="zh-TW" smtClean="0"/>
+              <a:rPr lang="en-US" altLang="zh-TW"/>
               <a:t>Fifth level</a:t>
             </a:r>
             <a:endParaRPr lang="zh-TW" altLang="en-US"/>
@@ -1361,7 +1361,7 @@
           <a:p>
             <a:fld id="{4DA9F5A9-C214-45DC-94BF-988DC142EE2C}" type="datetimeFigureOut">
               <a:rPr lang="zh-TW" altLang="en-US" smtClean="0"/>
-              <a:t>2022/4/16</a:t>
+              <a:t>2026/3/30</a:t>
             </a:fld>
             <a:endParaRPr lang="zh-TW" altLang="en-US"/>
           </a:p>
@@ -1459,7 +1459,7 @@
           </a:lstStyle>
           <a:p>
             <a:r>
-              <a:rPr lang="en-US" altLang="zh-TW" smtClean="0"/>
+              <a:rPr lang="en-US" altLang="zh-TW"/>
               <a:t>Click to edit Master title style</a:t>
             </a:r>
             <a:endParaRPr lang="zh-TW" altLang="en-US"/>
@@ -1525,7 +1525,7 @@
           <a:p>
             <a:pPr lvl="0"/>
             <a:r>
-              <a:rPr lang="en-US" altLang="zh-TW" smtClean="0"/>
+              <a:rPr lang="en-US" altLang="zh-TW"/>
               <a:t>Edit Master text styles</a:t>
             </a:r>
           </a:p>
@@ -1581,35 +1581,35 @@
           <a:p>
             <a:pPr lvl="0"/>
             <a:r>
-              <a:rPr lang="en-US" altLang="zh-TW" smtClean="0"/>
+              <a:rPr lang="en-US" altLang="zh-TW"/>
               <a:t>Edit Master text styles</a:t>
             </a:r>
           </a:p>
           <a:p>
             <a:pPr lvl="1"/>
             <a:r>
-              <a:rPr lang="en-US" altLang="zh-TW" smtClean="0"/>
+              <a:rPr lang="en-US" altLang="zh-TW"/>
               <a:t>Second level</a:t>
             </a:r>
           </a:p>
           <a:p>
             <a:pPr lvl="2"/>
             <a:r>
-              <a:rPr lang="en-US" altLang="zh-TW" smtClean="0"/>
+              <a:rPr lang="en-US" altLang="zh-TW"/>
               <a:t>Third level</a:t>
             </a:r>
           </a:p>
           <a:p>
             <a:pPr lvl="3"/>
             <a:r>
-              <a:rPr lang="en-US" altLang="zh-TW" smtClean="0"/>
+              <a:rPr lang="en-US" altLang="zh-TW"/>
               <a:t>Fourth level</a:t>
             </a:r>
           </a:p>
           <a:p>
             <a:pPr lvl="4"/>
             <a:r>
-              <a:rPr lang="en-US" altLang="zh-TW" smtClean="0"/>
+              <a:rPr lang="en-US" altLang="zh-TW"/>
               <a:t>Fifth level</a:t>
             </a:r>
             <a:endParaRPr lang="zh-TW" altLang="en-US"/>
@@ -1675,7 +1675,7 @@
           <a:p>
             <a:pPr lvl="0"/>
             <a:r>
-              <a:rPr lang="en-US" altLang="zh-TW" smtClean="0"/>
+              <a:rPr lang="en-US" altLang="zh-TW"/>
               <a:t>Edit Master text styles</a:t>
             </a:r>
           </a:p>
@@ -1731,35 +1731,35 @@
           <a:p>
             <a:pPr lvl="0"/>
             <a:r>
-              <a:rPr lang="en-US" altLang="zh-TW" smtClean="0"/>
+              <a:rPr lang="en-US" altLang="zh-TW"/>
               <a:t>Edit Master text styles</a:t>
             </a:r>
           </a:p>
           <a:p>
             <a:pPr lvl="1"/>
             <a:r>
-              <a:rPr lang="en-US" altLang="zh-TW" smtClean="0"/>
+              <a:rPr lang="en-US" altLang="zh-TW"/>
               <a:t>Second level</a:t>
             </a:r>
           </a:p>
           <a:p>
             <a:pPr lvl="2"/>
             <a:r>
-              <a:rPr lang="en-US" altLang="zh-TW" smtClean="0"/>
+              <a:rPr lang="en-US" altLang="zh-TW"/>
               <a:t>Third level</a:t>
             </a:r>
           </a:p>
           <a:p>
             <a:pPr lvl="3"/>
             <a:r>
-              <a:rPr lang="en-US" altLang="zh-TW" smtClean="0"/>
+              <a:rPr lang="en-US" altLang="zh-TW"/>
               <a:t>Fourth level</a:t>
             </a:r>
           </a:p>
           <a:p>
             <a:pPr lvl="4"/>
             <a:r>
-              <a:rPr lang="en-US" altLang="zh-TW" smtClean="0"/>
+              <a:rPr lang="en-US" altLang="zh-TW"/>
               <a:t>Fifth level</a:t>
             </a:r>
             <a:endParaRPr lang="zh-TW" altLang="en-US"/>
@@ -1783,7 +1783,7 @@
           <a:p>
             <a:fld id="{4DA9F5A9-C214-45DC-94BF-988DC142EE2C}" type="datetimeFigureOut">
               <a:rPr lang="zh-TW" altLang="en-US" smtClean="0"/>
-              <a:t>2022/4/16</a:t>
+              <a:t>2026/3/30</a:t>
             </a:fld>
             <a:endParaRPr lang="zh-TW" altLang="en-US"/>
           </a:p>
@@ -1877,7 +1877,7 @@
           <a:lstStyle/>
           <a:p>
             <a:r>
-              <a:rPr lang="en-US" altLang="zh-TW" smtClean="0"/>
+              <a:rPr lang="en-US" altLang="zh-TW"/>
               <a:t>Click to edit Master title style</a:t>
             </a:r>
             <a:endParaRPr lang="zh-TW" altLang="en-US"/>
@@ -1901,7 +1901,7 @@
           <a:p>
             <a:fld id="{4DA9F5A9-C214-45DC-94BF-988DC142EE2C}" type="datetimeFigureOut">
               <a:rPr lang="zh-TW" altLang="en-US" smtClean="0"/>
-              <a:t>2022/4/16</a:t>
+              <a:t>2026/3/30</a:t>
             </a:fld>
             <a:endParaRPr lang="zh-TW" altLang="en-US"/>
           </a:p>
@@ -1996,7 +1996,7 @@
           <a:p>
             <a:fld id="{4DA9F5A9-C214-45DC-94BF-988DC142EE2C}" type="datetimeFigureOut">
               <a:rPr lang="zh-TW" altLang="en-US" smtClean="0"/>
-              <a:t>2022/4/16</a:t>
+              <a:t>2026/3/30</a:t>
             </a:fld>
             <a:endParaRPr lang="zh-TW" altLang="en-US"/>
           </a:p>
@@ -2099,7 +2099,7 @@
           </a:lstStyle>
           <a:p>
             <a:r>
-              <a:rPr lang="en-US" altLang="zh-TW" smtClean="0"/>
+              <a:rPr lang="en-US" altLang="zh-TW"/>
               <a:t>Click to edit Master title style</a:t>
             </a:r>
             <a:endParaRPr lang="zh-TW" altLang="en-US"/>
@@ -2156,35 +2156,35 @@
           <a:p>
             <a:pPr lvl="0"/>
             <a:r>
-              <a:rPr lang="en-US" altLang="zh-TW" smtClean="0"/>
+              <a:rPr lang="en-US" altLang="zh-TW"/>
               <a:t>Edit Master text styles</a:t>
             </a:r>
           </a:p>
           <a:p>
             <a:pPr lvl="1"/>
             <a:r>
-              <a:rPr lang="en-US" altLang="zh-TW" smtClean="0"/>
+              <a:rPr lang="en-US" altLang="zh-TW"/>
               <a:t>Second level</a:t>
             </a:r>
           </a:p>
           <a:p>
             <a:pPr lvl="2"/>
             <a:r>
-              <a:rPr lang="en-US" altLang="zh-TW" smtClean="0"/>
+              <a:rPr lang="en-US" altLang="zh-TW"/>
               <a:t>Third level</a:t>
             </a:r>
           </a:p>
           <a:p>
             <a:pPr lvl="3"/>
             <a:r>
-              <a:rPr lang="en-US" altLang="zh-TW" smtClean="0"/>
+              <a:rPr lang="en-US" altLang="zh-TW"/>
               <a:t>Fourth level</a:t>
             </a:r>
           </a:p>
           <a:p>
             <a:pPr lvl="4"/>
             <a:r>
-              <a:rPr lang="en-US" altLang="zh-TW" smtClean="0"/>
+              <a:rPr lang="en-US" altLang="zh-TW"/>
               <a:t>Fifth level</a:t>
             </a:r>
             <a:endParaRPr lang="zh-TW" altLang="en-US"/>
@@ -2250,7 +2250,7 @@
           <a:p>
             <a:pPr lvl="0"/>
             <a:r>
-              <a:rPr lang="en-US" altLang="zh-TW" smtClean="0"/>
+              <a:rPr lang="en-US" altLang="zh-TW"/>
               <a:t>Edit Master text styles</a:t>
             </a:r>
           </a:p>
@@ -2273,7 +2273,7 @@
           <a:p>
             <a:fld id="{4DA9F5A9-C214-45DC-94BF-988DC142EE2C}" type="datetimeFigureOut">
               <a:rPr lang="zh-TW" altLang="en-US" smtClean="0"/>
-              <a:t>2022/4/16</a:t>
+              <a:t>2026/3/30</a:t>
             </a:fld>
             <a:endParaRPr lang="zh-TW" altLang="en-US"/>
           </a:p>
@@ -2376,7 +2376,7 @@
           </a:lstStyle>
           <a:p>
             <a:r>
-              <a:rPr lang="en-US" altLang="zh-TW" smtClean="0"/>
+              <a:rPr lang="en-US" altLang="zh-TW"/>
               <a:t>Click to edit Master title style</a:t>
             </a:r>
             <a:endParaRPr lang="zh-TW" altLang="en-US"/>
@@ -2441,7 +2441,7 @@
           </a:lstStyle>
           <a:p>
             <a:r>
-              <a:rPr lang="en-US" altLang="zh-TW" smtClean="0"/>
+              <a:rPr lang="en-US" altLang="zh-TW"/>
               <a:t>Click icon to add picture</a:t>
             </a:r>
             <a:endParaRPr lang="zh-TW" altLang="en-US"/>
@@ -2507,7 +2507,7 @@
           <a:p>
             <a:pPr lvl="0"/>
             <a:r>
-              <a:rPr lang="en-US" altLang="zh-TW" smtClean="0"/>
+              <a:rPr lang="en-US" altLang="zh-TW"/>
               <a:t>Edit Master text styles</a:t>
             </a:r>
           </a:p>
@@ -2530,7 +2530,7 @@
           <a:p>
             <a:fld id="{4DA9F5A9-C214-45DC-94BF-988DC142EE2C}" type="datetimeFigureOut">
               <a:rPr lang="zh-TW" altLang="en-US" smtClean="0"/>
-              <a:t>2022/4/16</a:t>
+              <a:t>2026/3/30</a:t>
             </a:fld>
             <a:endParaRPr lang="zh-TW" altLang="en-US"/>
           </a:p>
@@ -2644,10 +2644,9 @@
           <a:lstStyle/>
           <a:p>
             <a:r>
-              <a:rPr lang="zh-TW" altLang="en-US" smtClean="0"/>
+              <a:rPr lang="zh-TW" altLang="en-US"/>
               <a:t>按一下以編輯母片標題樣式</a:t>
             </a:r>
-            <a:endParaRPr lang="zh-TW" altLang="en-US"/>
           </a:p>
         </p:txBody>
       </p:sp>
@@ -2678,38 +2677,37 @@
           <a:p>
             <a:pPr lvl="0"/>
             <a:r>
-              <a:rPr lang="zh-TW" altLang="en-US" smtClean="0"/>
+              <a:rPr lang="zh-TW" altLang="en-US"/>
               <a:t>按一下以編輯母片文字樣式</a:t>
             </a:r>
           </a:p>
           <a:p>
             <a:pPr lvl="1"/>
             <a:r>
-              <a:rPr lang="zh-TW" altLang="en-US" smtClean="0"/>
+              <a:rPr lang="zh-TW" altLang="en-US"/>
               <a:t>第二層</a:t>
             </a:r>
           </a:p>
           <a:p>
             <a:pPr lvl="2"/>
             <a:r>
-              <a:rPr lang="zh-TW" altLang="en-US" smtClean="0"/>
+              <a:rPr lang="zh-TW" altLang="en-US"/>
               <a:t>第三層</a:t>
             </a:r>
           </a:p>
           <a:p>
             <a:pPr lvl="3"/>
             <a:r>
-              <a:rPr lang="zh-TW" altLang="en-US" smtClean="0"/>
+              <a:rPr lang="zh-TW" altLang="en-US"/>
               <a:t>第四層</a:t>
             </a:r>
           </a:p>
           <a:p>
             <a:pPr lvl="4"/>
             <a:r>
-              <a:rPr lang="zh-TW" altLang="en-US" smtClean="0"/>
+              <a:rPr lang="zh-TW" altLang="en-US"/>
               <a:t>第五層</a:t>
             </a:r>
-            <a:endParaRPr lang="zh-TW" altLang="en-US"/>
           </a:p>
         </p:txBody>
       </p:sp>
@@ -2748,7 +2746,7 @@
           <a:p>
             <a:fld id="{4DA9F5A9-C214-45DC-94BF-988DC142EE2C}" type="datetimeFigureOut">
               <a:rPr lang="zh-TW" altLang="en-US" smtClean="0"/>
-              <a:t>2022/4/16</a:t>
+              <a:t>2026/3/30</a:t>
             </a:fld>
             <a:endParaRPr lang="zh-TW" altLang="en-US"/>
           </a:p>
@@ -3146,23 +3144,6 @@
           <a:lstStyle/>
           <a:p>
             <a:r>
-              <a:rPr lang="zh-CN" altLang="en-US" sz="7200" b="1" i="1" dirty="0" smtClean="0">
-                <a:solidFill>
-                  <a:srgbClr val="000066"/>
-                </a:solidFill>
-                <a:effectLst>
-                  <a:outerShdw blurRad="38100" dist="38100" dir="2700000" algn="tl">
-                    <a:srgbClr val="000000">
-                      <a:alpha val="43137"/>
-                    </a:srgbClr>
-                  </a:outerShdw>
-                </a:effectLst>
-                <a:latin typeface="微軟正黑體" pitchFamily="34" charset="-120"/>
-                <a:ea typeface="微軟正黑體" pitchFamily="34" charset="-120"/>
-              </a:rPr>
-              <a:t>主</a:t>
-            </a:r>
-            <a:r>
               <a:rPr lang="zh-CN" altLang="en-US" sz="7200" b="1" i="1" dirty="0">
                 <a:solidFill>
                   <a:srgbClr val="000066"/>
@@ -3177,7 +3158,7 @@
                 <a:latin typeface="微軟正黑體" pitchFamily="34" charset="-120"/>
                 <a:ea typeface="微軟正黑體" pitchFamily="34" charset="-120"/>
               </a:rPr>
-              <a:t>耶穌復活了</a:t>
+              <a:t>主耶穌復活了</a:t>
             </a:r>
             <a:endParaRPr lang="zh-TW" altLang="en-US" sz="7200" b="1" i="1" dirty="0">
               <a:solidFill>
@@ -3252,16 +3233,6 @@
               <a:buNone/>
             </a:pPr>
             <a:r>
-              <a:rPr lang="zh-CN" altLang="en-US" sz="6400" b="1" dirty="0" smtClean="0">
-                <a:solidFill>
-                  <a:srgbClr val="000066"/>
-                </a:solidFill>
-                <a:latin typeface="微軟正黑體" pitchFamily="34" charset="-120"/>
-                <a:ea typeface="微軟正黑體" pitchFamily="34" charset="-120"/>
-              </a:rPr>
-              <a:t>百</a:t>
-            </a:r>
-            <a:r>
               <a:rPr lang="zh-CN" altLang="en-US" sz="6400" b="1" dirty="0">
                 <a:solidFill>
                   <a:srgbClr val="000066"/>
@@ -3269,7 +3240,7 @@
                 <a:latin typeface="微軟正黑體" pitchFamily="34" charset="-120"/>
                 <a:ea typeface="微軟正黑體" pitchFamily="34" charset="-120"/>
               </a:rPr>
-              <a:t>合花儿摇啊摇</a:t>
+              <a:t>百合花儿摇啊摇</a:t>
             </a:r>
             <a:endParaRPr lang="en-US" altLang="zh-CN" sz="6400" b="1" dirty="0">
               <a:solidFill>
@@ -3291,7 +3262,7 @@
                 <a:latin typeface="微軟正黑體" pitchFamily="34" charset="-120"/>
                 <a:ea typeface="微軟正黑體" pitchFamily="34" charset="-120"/>
               </a:rPr>
-              <a:t>樹上小鳥叫啊叫</a:t>
+              <a:t>樹上小鳥跳啊跳</a:t>
             </a:r>
             <a:endParaRPr lang="en-US" altLang="zh-CN" sz="6400" b="1" dirty="0">
               <a:solidFill>
@@ -3463,7 +3434,17 @@
                 <a:latin typeface="微軟正黑體" pitchFamily="34" charset="-120"/>
                 <a:ea typeface="微軟正黑體" pitchFamily="34" charset="-120"/>
               </a:rPr>
-              <a:t>主耶穌復活</a:t>
+              <a:t>主耶穌復活了</a:t>
+            </a:r>
+            <a:r>
+              <a:rPr lang="en-US" altLang="zh-CN" sz="6400" b="1" dirty="0">
+                <a:solidFill>
+                  <a:srgbClr val="000066"/>
+                </a:solidFill>
+                <a:latin typeface="微軟正黑體" pitchFamily="34" charset="-120"/>
+                <a:ea typeface="微軟正黑體" pitchFamily="34" charset="-120"/>
+              </a:rPr>
+              <a:t>   </a:t>
             </a:r>
             <a:r>
               <a:rPr lang="zh-CN" altLang="en-US" sz="6400" b="1" dirty="0">
@@ -3473,7 +3454,29 @@
                 <a:latin typeface="微軟正黑體" pitchFamily="34" charset="-120"/>
                 <a:ea typeface="微軟正黑體" pitchFamily="34" charset="-120"/>
               </a:rPr>
-              <a:t>了</a:t>
+              <a:t>復活了   復活了</a:t>
+            </a:r>
+            <a:endParaRPr lang="en-US" altLang="zh-CN" sz="6400" b="1" dirty="0">
+              <a:solidFill>
+                <a:srgbClr val="000066"/>
+              </a:solidFill>
+              <a:latin typeface="微軟正黑體" pitchFamily="34" charset="-120"/>
+              <a:ea typeface="微軟正黑體" pitchFamily="34" charset="-120"/>
+            </a:endParaRPr>
+          </a:p>
+          <a:p>
+            <a:pPr algn="ctr">
+              <a:buNone/>
+            </a:pPr>
+            <a:r>
+              <a:rPr lang="zh-CN" altLang="en-US" sz="6400" b="1" dirty="0">
+                <a:solidFill>
+                  <a:srgbClr val="000066"/>
+                </a:solidFill>
+                <a:latin typeface="微軟正黑體" pitchFamily="34" charset="-120"/>
+                <a:ea typeface="微軟正黑體" pitchFamily="34" charset="-120"/>
+              </a:rPr>
+              <a:t>主耶穌復活了</a:t>
             </a:r>
             <a:r>
               <a:rPr lang="en-US" altLang="zh-CN" sz="6400" b="1" dirty="0">
@@ -3483,27 +3486,7 @@
                 <a:latin typeface="微軟正黑體" pitchFamily="34" charset="-120"/>
                 <a:ea typeface="微軟正黑體" pitchFamily="34" charset="-120"/>
               </a:rPr>
-              <a:t>  </a:t>
-            </a:r>
-            <a:r>
-              <a:rPr lang="en-US" altLang="zh-CN" sz="6400" b="1" dirty="0" smtClean="0">
-                <a:solidFill>
-                  <a:srgbClr val="000066"/>
-                </a:solidFill>
-                <a:latin typeface="微軟正黑體" pitchFamily="34" charset="-120"/>
-                <a:ea typeface="微軟正黑體" pitchFamily="34" charset="-120"/>
-              </a:rPr>
-              <a:t> </a:t>
-            </a:r>
-            <a:r>
-              <a:rPr lang="zh-CN" altLang="en-US" sz="6400" b="1" dirty="0" smtClean="0">
-                <a:solidFill>
-                  <a:srgbClr val="000066"/>
-                </a:solidFill>
-                <a:latin typeface="微軟正黑體" pitchFamily="34" charset="-120"/>
-                <a:ea typeface="微軟正黑體" pitchFamily="34" charset="-120"/>
-              </a:rPr>
-              <a:t>復</a:t>
+              <a:t>   </a:t>
             </a:r>
             <a:r>
               <a:rPr lang="zh-CN" altLang="en-US" sz="6400" b="1" dirty="0">
@@ -3513,99 +3496,7 @@
                 <a:latin typeface="微軟正黑體" pitchFamily="34" charset="-120"/>
                 <a:ea typeface="微軟正黑體" pitchFamily="34" charset="-120"/>
               </a:rPr>
-              <a:t>活</a:t>
-            </a:r>
-            <a:r>
-              <a:rPr lang="zh-CN" altLang="en-US" sz="6400" b="1" dirty="0" smtClean="0">
-                <a:solidFill>
-                  <a:srgbClr val="000066"/>
-                </a:solidFill>
-                <a:latin typeface="微軟正黑體" pitchFamily="34" charset="-120"/>
-                <a:ea typeface="微軟正黑體" pitchFamily="34" charset="-120"/>
-              </a:rPr>
-              <a:t>了   復</a:t>
-            </a:r>
-            <a:r>
-              <a:rPr lang="zh-CN" altLang="en-US" sz="6400" b="1" dirty="0">
-                <a:solidFill>
-                  <a:srgbClr val="000066"/>
-                </a:solidFill>
-                <a:latin typeface="微軟正黑體" pitchFamily="34" charset="-120"/>
-                <a:ea typeface="微軟正黑體" pitchFamily="34" charset="-120"/>
-              </a:rPr>
-              <a:t>活了</a:t>
-            </a:r>
-            <a:endParaRPr lang="en-US" altLang="zh-CN" sz="6400" b="1" dirty="0">
-              <a:solidFill>
-                <a:srgbClr val="000066"/>
-              </a:solidFill>
-              <a:latin typeface="微軟正黑體" pitchFamily="34" charset="-120"/>
-              <a:ea typeface="微軟正黑體" pitchFamily="34" charset="-120"/>
-            </a:endParaRPr>
-          </a:p>
-          <a:p>
-            <a:pPr algn="ctr">
-              <a:buNone/>
-            </a:pPr>
-            <a:r>
-              <a:rPr lang="zh-CN" altLang="en-US" sz="6400" b="1" dirty="0">
-                <a:solidFill>
-                  <a:srgbClr val="000066"/>
-                </a:solidFill>
-                <a:latin typeface="微軟正黑體" pitchFamily="34" charset="-120"/>
-                <a:ea typeface="微軟正黑體" pitchFamily="34" charset="-120"/>
-              </a:rPr>
-              <a:t>主耶穌復活</a:t>
-            </a:r>
-            <a:r>
-              <a:rPr lang="zh-CN" altLang="en-US" sz="6400" b="1" dirty="0">
-                <a:solidFill>
-                  <a:srgbClr val="000066"/>
-                </a:solidFill>
-                <a:latin typeface="微軟正黑體" pitchFamily="34" charset="-120"/>
-                <a:ea typeface="微軟正黑體" pitchFamily="34" charset="-120"/>
-              </a:rPr>
-              <a:t>了</a:t>
-            </a:r>
-            <a:r>
-              <a:rPr lang="en-US" altLang="zh-CN" sz="6400" b="1" dirty="0">
-                <a:solidFill>
-                  <a:srgbClr val="000066"/>
-                </a:solidFill>
-                <a:latin typeface="微軟正黑體" pitchFamily="34" charset="-120"/>
-                <a:ea typeface="微軟正黑體" pitchFamily="34" charset="-120"/>
-              </a:rPr>
-              <a:t>  </a:t>
-            </a:r>
-            <a:r>
-              <a:rPr lang="en-US" altLang="zh-CN" sz="6400" b="1" dirty="0" smtClean="0">
-                <a:solidFill>
-                  <a:srgbClr val="000066"/>
-                </a:solidFill>
-                <a:latin typeface="微軟正黑體" pitchFamily="34" charset="-120"/>
-                <a:ea typeface="微軟正黑體" pitchFamily="34" charset="-120"/>
-              </a:rPr>
-              <a:t> </a:t>
-            </a:r>
-            <a:r>
-              <a:rPr lang="zh-CN" altLang="en-US" sz="6400" b="1" dirty="0" smtClean="0">
-                <a:solidFill>
-                  <a:srgbClr val="000066"/>
-                </a:solidFill>
-                <a:latin typeface="微軟正黑體" pitchFamily="34" charset="-120"/>
-                <a:ea typeface="微軟正黑體" pitchFamily="34" charset="-120"/>
-              </a:rPr>
-              <a:t>復</a:t>
-            </a:r>
-            <a:r>
-              <a:rPr lang="zh-CN" altLang="en-US" sz="6400" b="1" dirty="0">
-                <a:solidFill>
-                  <a:srgbClr val="000066"/>
-                </a:solidFill>
-                <a:latin typeface="微軟正黑體" pitchFamily="34" charset="-120"/>
-                <a:ea typeface="微軟正黑體" pitchFamily="34" charset="-120"/>
-              </a:rPr>
-              <a:t>活了</a:t>
+              <a:t>復活了</a:t>
             </a:r>
             <a:endParaRPr lang="en-US" altLang="zh-CN" sz="6400" b="1" dirty="0">
               <a:solidFill>
